--- a/ws01/class/3일차_1.pptx
+++ b/ws01/class/3일차_1.pptx
@@ -5810,33 +5810,6 @@
           </a:p>
         </p:txBody>
       </p:sp>
-      <p:pic>
-        <p:nvPicPr>
-          <p:cNvPr id="54" name="Google Shape;54;p1" descr="A black and white logo&#10;&#10;Description automatically generated"/>
-          <p:cNvPicPr preferRelativeResize="0"/>
-          <p:nvPr/>
-        </p:nvPicPr>
-        <p:blipFill rotWithShape="1">
-          <a:blip>
-            <a:alphaModFix/>
-          </a:blip>
-          <a:srcRect/>
-          <a:stretch/>
-        </p:blipFill>
-        <p:spPr>
-          <a:xfrm>
-            <a:off x="1044980" y="7531774"/>
-            <a:ext cx="2747103" cy="903358"/>
-          </a:xfrm>
-          <a:prstGeom prst="rect">
-            <a:avLst/>
-          </a:prstGeom>
-          <a:noFill/>
-          <a:ln>
-            <a:noFill/>
-          </a:ln>
-        </p:spPr>
-      </p:pic>
       <p:cxnSp>
         <p:nvCxnSpPr>
           <p:cNvPr id="55" name="Google Shape;55;p1"/>
@@ -5919,6 +5892,39 @@
           </a:p>
         </p:txBody>
       </p:sp>
+      <p:pic>
+        <p:nvPicPr>
+          <p:cNvPr id="3" name="Google Shape;54;p1" descr="A black and white logo&#10;&#10;Description automatically generated">
+            <a:extLst>
+              <a:ext uri="{FF2B5EF4-FFF2-40B4-BE49-F238E27FC236}">
+                <a16:creationId xmlns:a16="http://schemas.microsoft.com/office/drawing/2014/main" id="{80F808F2-5799-6FC7-000A-0BD585CEF9F3}"/>
+              </a:ext>
+            </a:extLst>
+          </p:cNvPr>
+          <p:cNvPicPr preferRelativeResize="0"/>
+          <p:nvPr/>
+        </p:nvPicPr>
+        <p:blipFill rotWithShape="1">
+          <a:blip r:embed="rId3">
+            <a:alphaModFix/>
+          </a:blip>
+          <a:srcRect/>
+          <a:stretch/>
+        </p:blipFill>
+        <p:spPr>
+          <a:xfrm>
+            <a:off x="1044980" y="7531774"/>
+            <a:ext cx="2747103" cy="903358"/>
+          </a:xfrm>
+          <a:prstGeom prst="rect">
+            <a:avLst/>
+          </a:prstGeom>
+          <a:noFill/>
+          <a:ln>
+            <a:noFill/>
+          </a:ln>
+        </p:spPr>
+      </p:pic>
     </p:spTree>
   </p:cSld>
   <p:clrMapOvr>
@@ -6112,30 +6118,6 @@
           </a:p>
         </p:txBody>
       </p:sp>
-      <p:pic>
-        <p:nvPicPr>
-          <p:cNvPr id="7" name="Image 0" descr="/sessions/peaceful-stoic-bardeen/imgs/tonghap_logo.png"/>
-          <p:cNvPicPr>
-            <a:picLocks noChangeAspect="1"/>
-          </p:cNvPicPr>
-          <p:nvPr/>
-        </p:nvPicPr>
-        <p:blipFill>
-          <a:blip/>
-          <a:stretch>
-            <a:fillRect/>
-          </a:stretch>
-        </p:blipFill>
-        <p:spPr>
-          <a:xfrm>
-            <a:off x="15270480" y="9235440"/>
-            <a:ext cx="2560320" cy="822960"/>
-          </a:xfrm>
-          <a:prstGeom prst="rect">
-            <a:avLst/>
-          </a:prstGeom>
-        </p:spPr>
-      </p:pic>
       <p:sp>
         <p:nvSpPr>
           <p:cNvPr id="6" name="Slide Number Placeholder 5">
@@ -6165,6 +6147,39 @@
           </a:p>
         </p:txBody>
       </p:sp>
+      <p:pic>
+        <p:nvPicPr>
+          <p:cNvPr id="8" name="Google Shape;87;p3" descr="A black and white logo&#10;&#10;Description automatically generated">
+            <a:extLst>
+              <a:ext uri="{FF2B5EF4-FFF2-40B4-BE49-F238E27FC236}">
+                <a16:creationId xmlns:a16="http://schemas.microsoft.com/office/drawing/2014/main" id="{6AB77958-8FFE-1B7F-14C8-F75685E11C84}"/>
+              </a:ext>
+            </a:extLst>
+          </p:cNvPr>
+          <p:cNvPicPr preferRelativeResize="0"/>
+          <p:nvPr/>
+        </p:nvPicPr>
+        <p:blipFill rotWithShape="1">
+          <a:blip r:embed="rId3">
+            <a:alphaModFix/>
+          </a:blip>
+          <a:srcRect/>
+          <a:stretch/>
+        </p:blipFill>
+        <p:spPr>
+          <a:xfrm>
+            <a:off x="14571521" y="8234444"/>
+            <a:ext cx="2806138" cy="922771"/>
+          </a:xfrm>
+          <a:prstGeom prst="rect">
+            <a:avLst/>
+          </a:prstGeom>
+          <a:noFill/>
+          <a:ln>
+            <a:noFill/>
+          </a:ln>
+        </p:spPr>
+      </p:pic>
     </p:spTree>
   </p:cSld>
   <p:clrMapOvr>
@@ -6301,67 +6316,6 @@
           </a:p>
         </p:txBody>
       </p:sp>
-      <p:pic>
-        <p:nvPicPr>
-          <p:cNvPr id="16" name="Image 0" descr="/sessions/peaceful-stoic-bardeen/mnt/security_lecture/강의_참고이미지/NIS_01_AI시스템구성요소_p9.png">
-            <a:extLst>
-              <a:ext uri="{FF2B5EF4-FFF2-40B4-BE49-F238E27FC236}">
-                <a16:creationId xmlns:a16="http://schemas.microsoft.com/office/drawing/2014/main" id="{96239E72-7A09-4E7C-186B-3F48959D08BE}"/>
-              </a:ext>
-            </a:extLst>
-          </p:cNvPr>
-          <p:cNvPicPr>
-            <a:picLocks noChangeAspect="1"/>
-          </p:cNvPicPr>
-          <p:nvPr/>
-        </p:nvPicPr>
-        <p:blipFill>
-          <a:blip/>
-          <a:srcRect t="31097" b="6230"/>
-          <a:stretch>
-            <a:fillRect/>
-          </a:stretch>
-        </p:blipFill>
-        <p:spPr>
-          <a:xfrm>
-            <a:off x="0" y="2835899"/>
-            <a:ext cx="10866597" cy="5099436"/>
-          </a:xfrm>
-          <a:prstGeom prst="rect">
-            <a:avLst/>
-          </a:prstGeom>
-        </p:spPr>
-      </p:pic>
-      <p:pic>
-        <p:nvPicPr>
-          <p:cNvPr id="18" name="Image 1" descr="/sessions/peaceful-stoic-bardeen/imgs/tonghap_logo.png">
-            <a:extLst>
-              <a:ext uri="{FF2B5EF4-FFF2-40B4-BE49-F238E27FC236}">
-                <a16:creationId xmlns:a16="http://schemas.microsoft.com/office/drawing/2014/main" id="{EFCCCBE8-83E7-EFB4-92ED-A2674A598050}"/>
-              </a:ext>
-            </a:extLst>
-          </p:cNvPr>
-          <p:cNvPicPr>
-            <a:picLocks noChangeAspect="1"/>
-          </p:cNvPicPr>
-          <p:nvPr/>
-        </p:nvPicPr>
-        <p:blipFill>
-          <a:blip/>
-          <a:stretch>
-            <a:fillRect/>
-          </a:stretch>
-        </p:blipFill>
-        <p:spPr>
-          <a:xfrm>
-            <a:off x="15270480" y="9235440"/>
-            <a:ext cx="2560320" cy="822960"/>
-          </a:xfrm>
-          <a:prstGeom prst="rect">
-            <a:avLst/>
-          </a:prstGeom>
-        </p:spPr>
-      </p:pic>
       <p:sp>
         <p:nvSpPr>
           <p:cNvPr id="17" name="Slide Number Placeholder 16">
@@ -6871,6 +6825,37 @@
           </a:p>
         </p:txBody>
       </p:sp>
+      <p:pic>
+        <p:nvPicPr>
+          <p:cNvPr id="2" name="Image 0" descr="/sessions/peaceful-stoic-bardeen/mnt/security_lecture/강의_참고이미지/NIS_01_AI시스템구성요소_p9.png">
+            <a:extLst>
+              <a:ext uri="{FF2B5EF4-FFF2-40B4-BE49-F238E27FC236}">
+                <a16:creationId xmlns:a16="http://schemas.microsoft.com/office/drawing/2014/main" id="{2E6F309C-D029-FED3-043E-B7A049E503A8}"/>
+              </a:ext>
+            </a:extLst>
+          </p:cNvPr>
+          <p:cNvPicPr>
+            <a:picLocks noChangeAspect="1"/>
+          </p:cNvPicPr>
+          <p:nvPr/>
+        </p:nvPicPr>
+        <p:blipFill>
+          <a:blip r:embed="rId3"/>
+          <a:srcRect t="31097" b="6230"/>
+          <a:stretch>
+            <a:fillRect/>
+          </a:stretch>
+        </p:blipFill>
+        <p:spPr>
+          <a:xfrm>
+            <a:off x="0" y="2835899"/>
+            <a:ext cx="10866597" cy="5099436"/>
+          </a:xfrm>
+          <a:prstGeom prst="rect">
+            <a:avLst/>
+          </a:prstGeom>
+        </p:spPr>
+      </p:pic>
     </p:spTree>
     <p:extLst>
       <p:ext uri="{BB962C8B-B14F-4D97-AF65-F5344CB8AC3E}">
@@ -7415,30 +7400,6 @@
           </a:p>
         </p:txBody>
       </p:sp>
-      <p:pic>
-        <p:nvPicPr>
-          <p:cNvPr id="17" name="Image 1" descr="/sessions/peaceful-stoic-bardeen/imgs/tonghap_logo.png"/>
-          <p:cNvPicPr>
-            <a:picLocks noChangeAspect="1"/>
-          </p:cNvPicPr>
-          <p:nvPr/>
-        </p:nvPicPr>
-        <p:blipFill>
-          <a:blip/>
-          <a:stretch>
-            <a:fillRect/>
-          </a:stretch>
-        </p:blipFill>
-        <p:spPr>
-          <a:xfrm>
-            <a:off x="15270480" y="9235440"/>
-            <a:ext cx="2560320" cy="822960"/>
-          </a:xfrm>
-          <a:prstGeom prst="rect">
-            <a:avLst/>
-          </a:prstGeom>
-        </p:spPr>
-      </p:pic>
       <p:sp>
         <p:nvSpPr>
           <p:cNvPr id="15" name="Slide Number Placeholder 14">
@@ -8075,36 +8036,6 @@
           </a:p>
         </p:txBody>
       </p:sp>
-      <p:pic>
-        <p:nvPicPr>
-          <p:cNvPr id="13" name="Image 0" descr="/sessions/peaceful-stoic-bardeen/imgs/tonghap_logo.png">
-            <a:extLst>
-              <a:ext uri="{FF2B5EF4-FFF2-40B4-BE49-F238E27FC236}">
-                <a16:creationId xmlns:a16="http://schemas.microsoft.com/office/drawing/2014/main" id="{C50D18AC-0EAA-1FCC-794F-DFEB29FA0EA5}"/>
-              </a:ext>
-            </a:extLst>
-          </p:cNvPr>
-          <p:cNvPicPr>
-            <a:picLocks noChangeAspect="1"/>
-          </p:cNvPicPr>
-          <p:nvPr/>
-        </p:nvPicPr>
-        <p:blipFill>
-          <a:blip/>
-          <a:stretch>
-            <a:fillRect/>
-          </a:stretch>
-        </p:blipFill>
-        <p:spPr>
-          <a:xfrm>
-            <a:off x="15270480" y="9235440"/>
-            <a:ext cx="2560320" cy="822960"/>
-          </a:xfrm>
-          <a:prstGeom prst="rect">
-            <a:avLst/>
-          </a:prstGeom>
-        </p:spPr>
-      </p:pic>
       <p:sp>
         <p:nvSpPr>
           <p:cNvPr id="12" name="Slide Number Placeholder 11">
@@ -8536,30 +8467,6 @@
           </a:p>
         </p:txBody>
       </p:sp>
-      <p:pic>
-        <p:nvPicPr>
-          <p:cNvPr id="13" name="Image 0" descr="/sessions/peaceful-stoic-bardeen/imgs/tonghap_logo.png"/>
-          <p:cNvPicPr>
-            <a:picLocks noChangeAspect="1"/>
-          </p:cNvPicPr>
-          <p:nvPr/>
-        </p:nvPicPr>
-        <p:blipFill>
-          <a:blip/>
-          <a:stretch>
-            <a:fillRect/>
-          </a:stretch>
-        </p:blipFill>
-        <p:spPr>
-          <a:xfrm>
-            <a:off x="15270480" y="9235440"/>
-            <a:ext cx="2560320" cy="822960"/>
-          </a:xfrm>
-          <a:prstGeom prst="rect">
-            <a:avLst/>
-          </a:prstGeom>
-        </p:spPr>
-      </p:pic>
       <p:sp>
         <p:nvSpPr>
           <p:cNvPr id="12" name="Slide Number Placeholder 11">
@@ -8761,30 +8668,6 @@
           </a:p>
         </p:txBody>
       </p:sp>
-      <p:pic>
-        <p:nvPicPr>
-          <p:cNvPr id="7" name="Image 0" descr="/sessions/peaceful-stoic-bardeen/imgs/tonghap_logo.png"/>
-          <p:cNvPicPr>
-            <a:picLocks noChangeAspect="1"/>
-          </p:cNvPicPr>
-          <p:nvPr/>
-        </p:nvPicPr>
-        <p:blipFill>
-          <a:blip/>
-          <a:stretch>
-            <a:fillRect/>
-          </a:stretch>
-        </p:blipFill>
-        <p:spPr>
-          <a:xfrm>
-            <a:off x="15270480" y="9235440"/>
-            <a:ext cx="2560320" cy="822960"/>
-          </a:xfrm>
-          <a:prstGeom prst="rect">
-            <a:avLst/>
-          </a:prstGeom>
-        </p:spPr>
-      </p:pic>
       <p:sp>
         <p:nvSpPr>
           <p:cNvPr id="6" name="Slide Number Placeholder 5">
@@ -8814,6 +8697,39 @@
           </a:p>
         </p:txBody>
       </p:sp>
+      <p:pic>
+        <p:nvPicPr>
+          <p:cNvPr id="5" name="Google Shape;87;p3" descr="A black and white logo&#10;&#10;Description automatically generated">
+            <a:extLst>
+              <a:ext uri="{FF2B5EF4-FFF2-40B4-BE49-F238E27FC236}">
+                <a16:creationId xmlns:a16="http://schemas.microsoft.com/office/drawing/2014/main" id="{85453DC0-3BB8-244F-9F68-1185CD859894}"/>
+              </a:ext>
+            </a:extLst>
+          </p:cNvPr>
+          <p:cNvPicPr preferRelativeResize="0"/>
+          <p:nvPr/>
+        </p:nvPicPr>
+        <p:blipFill rotWithShape="1">
+          <a:blip r:embed="rId3">
+            <a:alphaModFix/>
+          </a:blip>
+          <a:srcRect/>
+          <a:stretch/>
+        </p:blipFill>
+        <p:spPr>
+          <a:xfrm>
+            <a:off x="14571521" y="8234444"/>
+            <a:ext cx="2806138" cy="922771"/>
+          </a:xfrm>
+          <a:prstGeom prst="rect">
+            <a:avLst/>
+          </a:prstGeom>
+          <a:noFill/>
+          <a:ln>
+            <a:noFill/>
+          </a:ln>
+        </p:spPr>
+      </p:pic>
     </p:spTree>
   </p:cSld>
   <p:clrMapOvr>
@@ -13462,36 +13378,6 @@
           </a:p>
         </p:txBody>
       </p:sp>
-      <p:pic>
-        <p:nvPicPr>
-          <p:cNvPr id="7" name="Image 0" descr="/sessions/peaceful-stoic-bardeen/imgs/tonghap_logo.png">
-            <a:extLst>
-              <a:ext uri="{FF2B5EF4-FFF2-40B4-BE49-F238E27FC236}">
-                <a16:creationId xmlns:a16="http://schemas.microsoft.com/office/drawing/2014/main" id="{62AFC00E-53E1-E301-2887-BA9BC04F027C}"/>
-              </a:ext>
-            </a:extLst>
-          </p:cNvPr>
-          <p:cNvPicPr>
-            <a:picLocks noChangeAspect="1"/>
-          </p:cNvPicPr>
-          <p:nvPr/>
-        </p:nvPicPr>
-        <p:blipFill>
-          <a:blip/>
-          <a:stretch>
-            <a:fillRect/>
-          </a:stretch>
-        </p:blipFill>
-        <p:spPr>
-          <a:xfrm>
-            <a:off x="15270480" y="9235440"/>
-            <a:ext cx="2560320" cy="822960"/>
-          </a:xfrm>
-          <a:prstGeom prst="rect">
-            <a:avLst/>
-          </a:prstGeom>
-        </p:spPr>
-      </p:pic>
       <p:sp>
         <p:nvSpPr>
           <p:cNvPr id="6" name="Slide Number Placeholder 5">
@@ -25953,67 +25839,6 @@
           </a:p>
         </p:txBody>
       </p:sp>
-      <p:pic>
-        <p:nvPicPr>
-          <p:cNvPr id="57" name="Image 0" descr="/sessions/peaceful-stoic-bardeen/imgs/tonghap_logo.png">
-            <a:extLst>
-              <a:ext uri="{FF2B5EF4-FFF2-40B4-BE49-F238E27FC236}">
-                <a16:creationId xmlns:a16="http://schemas.microsoft.com/office/drawing/2014/main" id="{B58C972C-3A9B-2CFD-E30E-A69FEE36CE4A}"/>
-              </a:ext>
-            </a:extLst>
-          </p:cNvPr>
-          <p:cNvPicPr>
-            <a:picLocks noChangeAspect="1"/>
-          </p:cNvPicPr>
-          <p:nvPr/>
-        </p:nvPicPr>
-        <p:blipFill>
-          <a:blip/>
-          <a:stretch>
-            <a:fillRect/>
-          </a:stretch>
-        </p:blipFill>
-        <p:spPr>
-          <a:xfrm>
-            <a:off x="15270480" y="9235440"/>
-            <a:ext cx="2560320" cy="822960"/>
-          </a:xfrm>
-          <a:prstGeom prst="rect">
-            <a:avLst/>
-          </a:prstGeom>
-        </p:spPr>
-      </p:pic>
-      <p:pic>
-        <p:nvPicPr>
-          <p:cNvPr id="58" name="Image 0" descr="/sessions/peaceful-stoic-bardeen/mnt/security_lecture/강의_참고이미지/KISA_03_AI보안프레임워크_탐지대응_p83.png">
-            <a:extLst>
-              <a:ext uri="{FF2B5EF4-FFF2-40B4-BE49-F238E27FC236}">
-                <a16:creationId xmlns:a16="http://schemas.microsoft.com/office/drawing/2014/main" id="{EF7B446C-96BE-71FF-BEC5-D779A136FBC8}"/>
-              </a:ext>
-            </a:extLst>
-          </p:cNvPr>
-          <p:cNvPicPr>
-            <a:picLocks noChangeAspect="1"/>
-          </p:cNvPicPr>
-          <p:nvPr/>
-        </p:nvPicPr>
-        <p:blipFill>
-          <a:blip/>
-          <a:srcRect b="31976"/>
-          <a:stretch>
-            <a:fillRect/>
-          </a:stretch>
-        </p:blipFill>
-        <p:spPr>
-          <a:xfrm>
-            <a:off x="2206486" y="1826127"/>
-            <a:ext cx="14699667" cy="8460873"/>
-          </a:xfrm>
-          <a:prstGeom prst="rect">
-            <a:avLst/>
-          </a:prstGeom>
-        </p:spPr>
-      </p:pic>
       <p:sp>
         <p:nvSpPr>
           <p:cNvPr id="6" name="Slide Number Placeholder 5">
@@ -26043,6 +25868,37 @@
           </a:p>
         </p:txBody>
       </p:sp>
+      <p:pic>
+        <p:nvPicPr>
+          <p:cNvPr id="8" name="Image 0" descr="/sessions/peaceful-stoic-bardeen/mnt/security_lecture/강의_참고이미지/KISA_03_AI보안프레임워크_탐지대응_p83.png">
+            <a:extLst>
+              <a:ext uri="{FF2B5EF4-FFF2-40B4-BE49-F238E27FC236}">
+                <a16:creationId xmlns:a16="http://schemas.microsoft.com/office/drawing/2014/main" id="{861EF0D7-F415-5A9C-7815-E9F64E4D0317}"/>
+              </a:ext>
+            </a:extLst>
+          </p:cNvPr>
+          <p:cNvPicPr>
+            <a:picLocks noChangeAspect="1"/>
+          </p:cNvPicPr>
+          <p:nvPr/>
+        </p:nvPicPr>
+        <p:blipFill>
+          <a:blip r:embed="rId3"/>
+          <a:srcRect b="31976"/>
+          <a:stretch>
+            <a:fillRect/>
+          </a:stretch>
+        </p:blipFill>
+        <p:spPr>
+          <a:xfrm>
+            <a:off x="2206486" y="1826127"/>
+            <a:ext cx="14699667" cy="8460873"/>
+          </a:xfrm>
+          <a:prstGeom prst="rect">
+            <a:avLst/>
+          </a:prstGeom>
+        </p:spPr>
+      </p:pic>
     </p:spTree>
     <p:extLst>
       <p:ext uri="{BB962C8B-B14F-4D97-AF65-F5344CB8AC3E}">
@@ -32563,30 +32419,6 @@
           </a:p>
         </p:txBody>
       </p:sp>
-      <p:pic>
-        <p:nvPicPr>
-          <p:cNvPr id="55" name="Image 0" descr="/sessions/peaceful-stoic-bardeen/imgs/tonghap_logo.png"/>
-          <p:cNvPicPr>
-            <a:picLocks noChangeAspect="1"/>
-          </p:cNvPicPr>
-          <p:nvPr/>
-        </p:nvPicPr>
-        <p:blipFill>
-          <a:blip/>
-          <a:stretch>
-            <a:fillRect/>
-          </a:stretch>
-        </p:blipFill>
-        <p:spPr>
-          <a:xfrm>
-            <a:off x="15270480" y="9235440"/>
-            <a:ext cx="2560320" cy="822960"/>
-          </a:xfrm>
-          <a:prstGeom prst="rect">
-            <a:avLst/>
-          </a:prstGeom>
-        </p:spPr>
-      </p:pic>
       <p:sp>
         <p:nvSpPr>
           <p:cNvPr id="54" name="Slide Number Placeholder 53">
@@ -34628,30 +34460,6 @@
           </a:p>
         </p:txBody>
       </p:sp>
-      <p:pic>
-        <p:nvPicPr>
-          <p:cNvPr id="55" name="Image 0" descr="/sessions/peaceful-stoic-bardeen/imgs/tonghap_logo.png"/>
-          <p:cNvPicPr>
-            <a:picLocks noChangeAspect="1"/>
-          </p:cNvPicPr>
-          <p:nvPr/>
-        </p:nvPicPr>
-        <p:blipFill>
-          <a:blip r:embed="rId3"/>
-          <a:stretch>
-            <a:fillRect/>
-          </a:stretch>
-        </p:blipFill>
-        <p:spPr>
-          <a:xfrm>
-            <a:off x="15270480" y="9235440"/>
-            <a:ext cx="2560320" cy="822960"/>
-          </a:xfrm>
-          <a:prstGeom prst="rect">
-            <a:avLst/>
-          </a:prstGeom>
-        </p:spPr>
-      </p:pic>
       <p:sp>
         <p:nvSpPr>
           <p:cNvPr id="54" name="Slide Number Placeholder 53">
@@ -37915,53 +37723,6 @@
           </a:p>
         </p:txBody>
       </p:sp>
-      <p:sp>
-        <p:nvSpPr>
-          <p:cNvPr id="13" name="Text 11"/>
-          <p:cNvSpPr/>
-          <p:nvPr/>
-        </p:nvSpPr>
-        <p:spPr>
-          <a:xfrm>
-            <a:off x="16459200" y="9656064"/>
-            <a:ext cx="914400" cy="548640"/>
-          </a:xfrm>
-          <a:prstGeom prst="rect">
-            <a:avLst/>
-          </a:prstGeom>
-          <a:noFill/>
-          <a:ln/>
-        </p:spPr>
-        <p:txBody>
-          <a:bodyPr wrap="square" lIns="0" tIns="0" rIns="0" bIns="0" rtlCol="0" anchor="ctr"/>
-          <a:lstStyle/>
-          <a:p>
-            <a:pPr algn="r">
-              <a:defRPr>
-                <a:solidFill>
-                  <a:srgbClr val="FFFFFF"/>
-                </a:solidFill>
-              </a:defRPr>
-            </a:pPr>
-            <a:r>
-              <a:rPr lang="en-US" altLang="ko-KR" sz="1600" dirty="0">
-                <a:solidFill>
-                  <a:srgbClr val="002060"/>
-                </a:solidFill>
-                <a:latin typeface="Arial" pitchFamily="34" charset="0"/>
-                <a:ea typeface="Arial" pitchFamily="34" charset="-122"/>
-                <a:cs typeface="Arial" pitchFamily="34" charset="-120"/>
-              </a:rPr>
-              <a:t>29</a:t>
-            </a:r>
-            <a:endParaRPr lang="en-US" sz="1600" dirty="0">
-              <a:solidFill>
-                <a:srgbClr val="002060"/>
-              </a:solidFill>
-            </a:endParaRPr>
-          </a:p>
-        </p:txBody>
-      </p:sp>
     </p:spTree>
   </p:cSld>
   <p:clrMapOvr>
@@ -38675,53 +38436,6 @@
           </a:p>
         </p:txBody>
       </p:sp>
-      <p:sp>
-        <p:nvSpPr>
-          <p:cNvPr id="19" name="Text 17"/>
-          <p:cNvSpPr/>
-          <p:nvPr/>
-        </p:nvSpPr>
-        <p:spPr>
-          <a:xfrm>
-            <a:off x="16459200" y="9656064"/>
-            <a:ext cx="914400" cy="548640"/>
-          </a:xfrm>
-          <a:prstGeom prst="rect">
-            <a:avLst/>
-          </a:prstGeom>
-          <a:noFill/>
-          <a:ln/>
-        </p:spPr>
-        <p:txBody>
-          <a:bodyPr wrap="square" lIns="0" tIns="0" rIns="0" bIns="0" rtlCol="0" anchor="ctr"/>
-          <a:lstStyle/>
-          <a:p>
-            <a:pPr algn="r">
-              <a:defRPr>
-                <a:solidFill>
-                  <a:srgbClr val="FFFFFF"/>
-                </a:solidFill>
-              </a:defRPr>
-            </a:pPr>
-            <a:r>
-              <a:rPr lang="en-US" altLang="ko-KR" sz="1600" dirty="0">
-                <a:solidFill>
-                  <a:srgbClr val="002060"/>
-                </a:solidFill>
-                <a:latin typeface="Arial" pitchFamily="34" charset="0"/>
-                <a:ea typeface="Arial" pitchFamily="34" charset="-122"/>
-                <a:cs typeface="Arial" pitchFamily="34" charset="-120"/>
-              </a:rPr>
-              <a:t>30</a:t>
-            </a:r>
-            <a:endParaRPr lang="en-US" sz="1600" dirty="0">
-              <a:solidFill>
-                <a:srgbClr val="002060"/>
-              </a:solidFill>
-            </a:endParaRPr>
-          </a:p>
-        </p:txBody>
-      </p:sp>
     </p:spTree>
   </p:cSld>
   <p:clrMapOvr>
@@ -39495,53 +39209,6 @@
           </a:p>
         </p:txBody>
       </p:sp>
-      <p:sp>
-        <p:nvSpPr>
-          <p:cNvPr id="20" name="Text 18"/>
-          <p:cNvSpPr/>
-          <p:nvPr/>
-        </p:nvSpPr>
-        <p:spPr>
-          <a:xfrm>
-            <a:off x="16459200" y="9656064"/>
-            <a:ext cx="914400" cy="548640"/>
-          </a:xfrm>
-          <a:prstGeom prst="rect">
-            <a:avLst/>
-          </a:prstGeom>
-          <a:noFill/>
-          <a:ln/>
-        </p:spPr>
-        <p:txBody>
-          <a:bodyPr wrap="square" lIns="0" tIns="0" rIns="0" bIns="0" rtlCol="0" anchor="ctr"/>
-          <a:lstStyle/>
-          <a:p>
-            <a:pPr algn="r">
-              <a:defRPr>
-                <a:solidFill>
-                  <a:srgbClr val="FFFFFF"/>
-                </a:solidFill>
-              </a:defRPr>
-            </a:pPr>
-            <a:r>
-              <a:rPr lang="en-US" altLang="ko-KR" sz="1600" dirty="0">
-                <a:solidFill>
-                  <a:srgbClr val="002060"/>
-                </a:solidFill>
-                <a:latin typeface="Arial" pitchFamily="34" charset="0"/>
-                <a:ea typeface="Arial" pitchFamily="34" charset="-122"/>
-                <a:cs typeface="Arial" pitchFamily="34" charset="-120"/>
-              </a:rPr>
-              <a:t>31</a:t>
-            </a:r>
-            <a:endParaRPr lang="en-US" sz="1600" dirty="0">
-              <a:solidFill>
-                <a:srgbClr val="002060"/>
-              </a:solidFill>
-            </a:endParaRPr>
-          </a:p>
-        </p:txBody>
-      </p:sp>
     </p:spTree>
   </p:cSld>
   <p:clrMapOvr>
@@ -41409,53 +41076,6 @@
           </a:p>
         </p:txBody>
       </p:sp>
-      <p:sp>
-        <p:nvSpPr>
-          <p:cNvPr id="24" name="Text 22"/>
-          <p:cNvSpPr/>
-          <p:nvPr/>
-        </p:nvSpPr>
-        <p:spPr>
-          <a:xfrm>
-            <a:off x="16459200" y="9656064"/>
-            <a:ext cx="914400" cy="548640"/>
-          </a:xfrm>
-          <a:prstGeom prst="rect">
-            <a:avLst/>
-          </a:prstGeom>
-          <a:noFill/>
-          <a:ln/>
-        </p:spPr>
-        <p:txBody>
-          <a:bodyPr wrap="square" lIns="0" tIns="0" rIns="0" bIns="0" rtlCol="0" anchor="ctr"/>
-          <a:lstStyle/>
-          <a:p>
-            <a:pPr algn="r">
-              <a:defRPr>
-                <a:solidFill>
-                  <a:srgbClr val="FFFFFF"/>
-                </a:solidFill>
-              </a:defRPr>
-            </a:pPr>
-            <a:r>
-              <a:rPr lang="en-US" altLang="ko-KR" sz="1600" dirty="0">
-                <a:solidFill>
-                  <a:srgbClr val="002060"/>
-                </a:solidFill>
-                <a:latin typeface="Arial" pitchFamily="34" charset="0"/>
-                <a:ea typeface="Arial" pitchFamily="34" charset="-122"/>
-                <a:cs typeface="Arial" pitchFamily="34" charset="-120"/>
-              </a:rPr>
-              <a:t>33</a:t>
-            </a:r>
-            <a:endParaRPr lang="en-US" sz="1600" dirty="0">
-              <a:solidFill>
-                <a:srgbClr val="002060"/>
-              </a:solidFill>
-            </a:endParaRPr>
-          </a:p>
-        </p:txBody>
-      </p:sp>
     </p:spTree>
   </p:cSld>
   <p:clrMapOvr>
@@ -42870,53 +42490,6 @@
               <a:t>M15 가드레일 다중화</a:t>
             </a:r>
             <a:endParaRPr lang="en-US" dirty="0">
-              <a:solidFill>
-                <a:srgbClr val="002060"/>
-              </a:solidFill>
-            </a:endParaRPr>
-          </a:p>
-        </p:txBody>
-      </p:sp>
-      <p:sp>
-        <p:nvSpPr>
-          <p:cNvPr id="58" name="Text 56"/>
-          <p:cNvSpPr/>
-          <p:nvPr/>
-        </p:nvSpPr>
-        <p:spPr>
-          <a:xfrm>
-            <a:off x="16459200" y="9656064"/>
-            <a:ext cx="914400" cy="548640"/>
-          </a:xfrm>
-          <a:prstGeom prst="rect">
-            <a:avLst/>
-          </a:prstGeom>
-          <a:noFill/>
-          <a:ln/>
-        </p:spPr>
-        <p:txBody>
-          <a:bodyPr wrap="square" lIns="0" tIns="0" rIns="0" bIns="0" rtlCol="0" anchor="ctr"/>
-          <a:lstStyle/>
-          <a:p>
-            <a:pPr algn="r">
-              <a:defRPr>
-                <a:solidFill>
-                  <a:srgbClr val="FFFFFF"/>
-                </a:solidFill>
-              </a:defRPr>
-            </a:pPr>
-            <a:r>
-              <a:rPr lang="en-US" altLang="ko-KR" sz="1600" dirty="0">
-                <a:solidFill>
-                  <a:srgbClr val="002060"/>
-                </a:solidFill>
-                <a:latin typeface="Arial" pitchFamily="34" charset="0"/>
-                <a:ea typeface="Arial" pitchFamily="34" charset="-122"/>
-                <a:cs typeface="Arial" pitchFamily="34" charset="-120"/>
-              </a:rPr>
-              <a:t>34</a:t>
-            </a:r>
-            <a:endParaRPr lang="en-US" sz="1600" dirty="0">
               <a:solidFill>
                 <a:srgbClr val="002060"/>
               </a:solidFill>
@@ -45264,30 +44837,6 @@
           </a:p>
         </p:txBody>
       </p:sp>
-      <p:pic>
-        <p:nvPicPr>
-          <p:cNvPr id="18" name="Image 0" descr="/sessions/peaceful-stoic-bardeen/imgs/tonghap_logo.png"/>
-          <p:cNvPicPr>
-            <a:picLocks noChangeAspect="1"/>
-          </p:cNvPicPr>
-          <p:nvPr/>
-        </p:nvPicPr>
-        <p:blipFill>
-          <a:blip/>
-          <a:stretch>
-            <a:fillRect/>
-          </a:stretch>
-        </p:blipFill>
-        <p:spPr>
-          <a:xfrm>
-            <a:off x="15270480" y="9235440"/>
-            <a:ext cx="2560320" cy="822960"/>
-          </a:xfrm>
-          <a:prstGeom prst="rect">
-            <a:avLst/>
-          </a:prstGeom>
-        </p:spPr>
-      </p:pic>
       <p:sp>
         <p:nvSpPr>
           <p:cNvPr id="17" name="Slide Number Placeholder 16">
@@ -45499,30 +45048,6 @@
           </a:p>
         </p:txBody>
       </p:sp>
-      <p:pic>
-        <p:nvPicPr>
-          <p:cNvPr id="7" name="Image 0" descr="/sessions/peaceful-stoic-bardeen/imgs/tonghap_logo.png"/>
-          <p:cNvPicPr>
-            <a:picLocks noChangeAspect="1"/>
-          </p:cNvPicPr>
-          <p:nvPr/>
-        </p:nvPicPr>
-        <p:blipFill>
-          <a:blip/>
-          <a:stretch>
-            <a:fillRect/>
-          </a:stretch>
-        </p:blipFill>
-        <p:spPr>
-          <a:xfrm>
-            <a:off x="15270480" y="9235440"/>
-            <a:ext cx="2560320" cy="822960"/>
-          </a:xfrm>
-          <a:prstGeom prst="rect">
-            <a:avLst/>
-          </a:prstGeom>
-        </p:spPr>
-      </p:pic>
       <p:sp>
         <p:nvSpPr>
           <p:cNvPr id="6" name="Slide Number Placeholder 5">
@@ -46354,30 +45879,6 @@
           </a:p>
         </p:txBody>
       </p:sp>
-      <p:pic>
-        <p:nvPicPr>
-          <p:cNvPr id="19" name="Image 0" descr="/sessions/peaceful-stoic-bardeen/imgs/tonghap_logo.png"/>
-          <p:cNvPicPr>
-            <a:picLocks noChangeAspect="1"/>
-          </p:cNvPicPr>
-          <p:nvPr/>
-        </p:nvPicPr>
-        <p:blipFill>
-          <a:blip/>
-          <a:stretch>
-            <a:fillRect/>
-          </a:stretch>
-        </p:blipFill>
-        <p:spPr>
-          <a:xfrm>
-            <a:off x="15270480" y="9235440"/>
-            <a:ext cx="2560320" cy="822960"/>
-          </a:xfrm>
-          <a:prstGeom prst="rect">
-            <a:avLst/>
-          </a:prstGeom>
-        </p:spPr>
-      </p:pic>
       <p:sp>
         <p:nvSpPr>
           <p:cNvPr id="18" name="Slide Number Placeholder 17">
@@ -46948,30 +46449,6 @@
           </a:p>
         </p:txBody>
       </p:sp>
-      <p:pic>
-        <p:nvPicPr>
-          <p:cNvPr id="16" name="Image 0" descr="/sessions/peaceful-stoic-bardeen/imgs/tonghap_logo.png"/>
-          <p:cNvPicPr>
-            <a:picLocks noChangeAspect="1"/>
-          </p:cNvPicPr>
-          <p:nvPr/>
-        </p:nvPicPr>
-        <p:blipFill>
-          <a:blip/>
-          <a:stretch>
-            <a:fillRect/>
-          </a:stretch>
-        </p:blipFill>
-        <p:spPr>
-          <a:xfrm>
-            <a:off x="15270480" y="9235440"/>
-            <a:ext cx="2560320" cy="822960"/>
-          </a:xfrm>
-          <a:prstGeom prst="rect">
-            <a:avLst/>
-          </a:prstGeom>
-        </p:spPr>
-      </p:pic>
       <p:sp>
         <p:nvSpPr>
           <p:cNvPr id="15" name="Slide Number Placeholder 14">
@@ -48525,30 +48002,6 @@
           </a:p>
         </p:txBody>
       </p:sp>
-      <p:pic>
-        <p:nvPicPr>
-          <p:cNvPr id="12" name="Image 0" descr="/sessions/peaceful-stoic-bardeen/imgs/tonghap_logo.png"/>
-          <p:cNvPicPr>
-            <a:picLocks noChangeAspect="1"/>
-          </p:cNvPicPr>
-          <p:nvPr/>
-        </p:nvPicPr>
-        <p:blipFill>
-          <a:blip/>
-          <a:stretch>
-            <a:fillRect/>
-          </a:stretch>
-        </p:blipFill>
-        <p:spPr>
-          <a:xfrm>
-            <a:off x="15270480" y="9235440"/>
-            <a:ext cx="2560320" cy="822960"/>
-          </a:xfrm>
-          <a:prstGeom prst="rect">
-            <a:avLst/>
-          </a:prstGeom>
-        </p:spPr>
-      </p:pic>
       <p:sp>
         <p:nvSpPr>
           <p:cNvPr id="11" name="Slide Number Placeholder 10">

--- a/ws01/class/3일차_1.pptx
+++ b/ws01/class/3일차_1.pptx
@@ -16006,54 +16006,87 @@
           <a:bodyPr wrap="square" rtlCol="0" anchor="t"/>
           <a:lstStyle/>
           <a:p>
+            <a:pPr algn="ctr"/>
+            <a:r>
+              <a:rPr lang="en-US" altLang="ko-KR" sz="2100" dirty="0" err="1">
+                <a:solidFill>
+                  <a:srgbClr val="111848"/>
+                </a:solidFill>
+                <a:latin typeface="Calibri" pitchFamily="34" charset="0"/>
+                <a:ea typeface="Calibri" pitchFamily="34" charset="-122"/>
+                <a:cs typeface="Calibri" pitchFamily="34" charset="-120"/>
+              </a:rPr>
+              <a:t>임베딩</a:t>
+            </a:r>
+            <a:r>
+              <a:rPr lang="en-US" altLang="ko-KR" sz="2100" dirty="0">
+                <a:solidFill>
+                  <a:srgbClr val="111848"/>
+                </a:solidFill>
+                <a:latin typeface="Calibri" pitchFamily="34" charset="0"/>
+                <a:ea typeface="Calibri" pitchFamily="34" charset="-122"/>
+                <a:cs typeface="Calibri" pitchFamily="34" charset="-120"/>
+              </a:rPr>
+              <a:t>/</a:t>
+            </a:r>
+            <a:r>
+              <a:rPr lang="en-US" altLang="ko-KR" sz="2100" dirty="0" err="1">
+                <a:solidFill>
+                  <a:srgbClr val="111848"/>
+                </a:solidFill>
+                <a:latin typeface="Calibri" pitchFamily="34" charset="0"/>
+                <a:ea typeface="Calibri" pitchFamily="34" charset="-122"/>
+                <a:cs typeface="Calibri" pitchFamily="34" charset="-120"/>
+              </a:rPr>
+              <a:t>벡터</a:t>
+            </a:r>
+            <a:endParaRPr lang="en-US" altLang="ko-KR" sz="2100" dirty="0"/>
+          </a:p>
+          <a:p>
+            <a:pPr algn="ctr"/>
+            <a:r>
+              <a:rPr lang="en-US" altLang="ko-KR" sz="2100" dirty="0">
+                <a:solidFill>
+                  <a:srgbClr val="111848"/>
+                </a:solidFill>
+                <a:latin typeface="Calibri" pitchFamily="34" charset="0"/>
+                <a:ea typeface="Calibri" pitchFamily="34" charset="-122"/>
+                <a:cs typeface="Calibri" pitchFamily="34" charset="-120"/>
+              </a:rPr>
+              <a:t>DB </a:t>
+            </a:r>
+            <a:r>
+              <a:rPr lang="en-US" altLang="ko-KR" sz="2100" dirty="0" err="1">
+                <a:solidFill>
+                  <a:srgbClr val="111848"/>
+                </a:solidFill>
+                <a:latin typeface="Calibri" pitchFamily="34" charset="0"/>
+                <a:ea typeface="Calibri" pitchFamily="34" charset="-122"/>
+                <a:cs typeface="Calibri" pitchFamily="34" charset="-120"/>
+              </a:rPr>
+              <a:t>취약점</a:t>
+            </a:r>
+            <a:endParaRPr lang="en-US" altLang="ko-KR" sz="2100" dirty="0"/>
+          </a:p>
+          <a:p>
+            <a:pPr algn="ctr"/>
+            <a:r>
+              <a:rPr lang="en-US" altLang="ko-KR" sz="2100" dirty="0" err="1">
+                <a:solidFill>
+                  <a:srgbClr val="111848"/>
+                </a:solidFill>
+                <a:latin typeface="Calibri" pitchFamily="34" charset="0"/>
+                <a:ea typeface="Calibri" pitchFamily="34" charset="-122"/>
+                <a:cs typeface="Calibri" pitchFamily="34" charset="-120"/>
+              </a:rPr>
+              <a:t>실습</a:t>
+            </a:r>
+            <a:endParaRPr lang="en-US" altLang="ko-KR" sz="2100" dirty="0"/>
+          </a:p>
+          <a:p>
             <a:pPr marL="0" indent="0" algn="ctr">
               <a:buNone/>
             </a:pPr>
-            <a:r>
-              <a:rPr lang="en-US" sz="2100" dirty="0">
-                <a:solidFill>
-                  <a:srgbClr val="111848"/>
-                </a:solidFill>
-                <a:latin typeface="Calibri" pitchFamily="34" charset="0"/>
-                <a:ea typeface="Calibri" pitchFamily="34" charset="-122"/>
-                <a:cs typeface="Calibri" pitchFamily="34" charset="-120"/>
-              </a:rPr>
-              <a:t>출력 통제</a:t>
-            </a:r>
-            <a:endParaRPr lang="en-US" sz="2100" dirty="0"/>
-          </a:p>
-          <a:p>
-            <a:pPr marL="0" indent="0" algn="ctr">
-              <a:buNone/>
-            </a:pPr>
-            <a:r>
-              <a:rPr lang="en-US" sz="2100" dirty="0">
-                <a:solidFill>
-                  <a:srgbClr val="111848"/>
-                </a:solidFill>
-                <a:latin typeface="Calibri" pitchFamily="34" charset="0"/>
-                <a:ea typeface="Calibri" pitchFamily="34" charset="-122"/>
-                <a:cs typeface="Calibri" pitchFamily="34" charset="-120"/>
-              </a:rPr>
-              <a:t>데이터 유출</a:t>
-            </a:r>
-            <a:endParaRPr lang="en-US" sz="2100" dirty="0"/>
-          </a:p>
-          <a:p>
-            <a:pPr marL="0" indent="0" algn="ctr">
-              <a:buNone/>
-            </a:pPr>
-            <a:r>
-              <a:rPr lang="en-US" sz="2100" dirty="0">
-                <a:solidFill>
-                  <a:srgbClr val="111848"/>
-                </a:solidFill>
-                <a:latin typeface="Calibri" pitchFamily="34" charset="0"/>
-                <a:ea typeface="Calibri" pitchFamily="34" charset="-122"/>
-                <a:cs typeface="Calibri" pitchFamily="34" charset="-120"/>
-              </a:rPr>
-              <a:t>권한 오남용</a:t>
-            </a:r>
             <a:endParaRPr lang="en-US" sz="2100" dirty="0"/>
           </a:p>
         </p:txBody>
@@ -16291,11 +16324,9 @@
           <a:bodyPr wrap="square" rtlCol="0" anchor="t"/>
           <a:lstStyle/>
           <a:p>
-            <a:pPr marL="0" indent="0" algn="ctr">
-              <a:buNone/>
-            </a:pPr>
-            <a:r>
-              <a:rPr lang="en-US" sz="2100" dirty="0">
+            <a:pPr algn="ctr"/>
+            <a:r>
+              <a:rPr lang="en-US" altLang="ko-KR" sz="2100" dirty="0" err="1">
                 <a:solidFill>
                   <a:srgbClr val="111848"/>
                 </a:solidFill>
@@ -16303,16 +16334,10 @@
                 <a:ea typeface="Calibri" pitchFamily="34" charset="-122"/>
                 <a:cs typeface="Calibri" pitchFamily="34" charset="-120"/>
               </a:rPr>
-              <a:t>임베딩/벡터</a:t>
-            </a:r>
-            <a:endParaRPr lang="en-US" sz="2100" dirty="0"/>
-          </a:p>
-          <a:p>
-            <a:pPr marL="0" indent="0" algn="ctr">
-              <a:buNone/>
-            </a:pPr>
-            <a:r>
-              <a:rPr lang="en-US" sz="2100" dirty="0">
+              <a:t>출력</a:t>
+            </a:r>
+            <a:r>
+              <a:rPr lang="en-US" altLang="ko-KR" sz="2100" dirty="0">
                 <a:solidFill>
                   <a:srgbClr val="111848"/>
                 </a:solidFill>
@@ -16320,16 +16345,10 @@
                 <a:ea typeface="Calibri" pitchFamily="34" charset="-122"/>
                 <a:cs typeface="Calibri" pitchFamily="34" charset="-120"/>
               </a:rPr>
-              <a:t>DB 취약점</a:t>
-            </a:r>
-            <a:endParaRPr lang="en-US" sz="2100" dirty="0"/>
-          </a:p>
-          <a:p>
-            <a:pPr marL="0" indent="0" algn="ctr">
-              <a:buNone/>
-            </a:pPr>
-            <a:r>
-              <a:rPr lang="en-US" sz="2100" dirty="0">
+              <a:t> </a:t>
+            </a:r>
+            <a:r>
+              <a:rPr lang="en-US" altLang="ko-KR" sz="2100" dirty="0" err="1">
                 <a:solidFill>
                   <a:srgbClr val="111848"/>
                 </a:solidFill>
@@ -16337,7 +16356,81 @@
                 <a:ea typeface="Calibri" pitchFamily="34" charset="-122"/>
                 <a:cs typeface="Calibri" pitchFamily="34" charset="-120"/>
               </a:rPr>
-              <a:t>실습</a:t>
+              <a:t>통제</a:t>
+            </a:r>
+            <a:endParaRPr lang="en-US" altLang="ko-KR" sz="2100" dirty="0"/>
+          </a:p>
+          <a:p>
+            <a:pPr algn="ctr"/>
+            <a:r>
+              <a:rPr lang="en-US" altLang="ko-KR" sz="2100" dirty="0" err="1">
+                <a:solidFill>
+                  <a:srgbClr val="111848"/>
+                </a:solidFill>
+                <a:latin typeface="Calibri" pitchFamily="34" charset="0"/>
+                <a:ea typeface="Calibri" pitchFamily="34" charset="-122"/>
+                <a:cs typeface="Calibri" pitchFamily="34" charset="-120"/>
+              </a:rPr>
+              <a:t>데이터</a:t>
+            </a:r>
+            <a:r>
+              <a:rPr lang="en-US" altLang="ko-KR" sz="2100" dirty="0">
+                <a:solidFill>
+                  <a:srgbClr val="111848"/>
+                </a:solidFill>
+                <a:latin typeface="Calibri" pitchFamily="34" charset="0"/>
+                <a:ea typeface="Calibri" pitchFamily="34" charset="-122"/>
+                <a:cs typeface="Calibri" pitchFamily="34" charset="-120"/>
+              </a:rPr>
+              <a:t> </a:t>
+            </a:r>
+            <a:r>
+              <a:rPr lang="en-US" altLang="ko-KR" sz="2100" dirty="0" err="1">
+                <a:solidFill>
+                  <a:srgbClr val="111848"/>
+                </a:solidFill>
+                <a:latin typeface="Calibri" pitchFamily="34" charset="0"/>
+                <a:ea typeface="Calibri" pitchFamily="34" charset="-122"/>
+                <a:cs typeface="Calibri" pitchFamily="34" charset="-120"/>
+              </a:rPr>
+              <a:t>유출</a:t>
+            </a:r>
+            <a:endParaRPr lang="en-US" altLang="ko-KR" sz="2100" dirty="0"/>
+          </a:p>
+          <a:p>
+            <a:pPr algn="ctr"/>
+            <a:r>
+              <a:rPr lang="en-US" altLang="ko-KR" sz="2100" dirty="0" err="1">
+                <a:solidFill>
+                  <a:srgbClr val="111848"/>
+                </a:solidFill>
+                <a:latin typeface="Calibri" pitchFamily="34" charset="0"/>
+                <a:ea typeface="Calibri" pitchFamily="34" charset="-122"/>
+                <a:cs typeface="Calibri" pitchFamily="34" charset="-120"/>
+              </a:rPr>
+              <a:t>권한</a:t>
+            </a:r>
+            <a:r>
+              <a:rPr lang="en-US" altLang="ko-KR" sz="2100" dirty="0">
+                <a:solidFill>
+                  <a:srgbClr val="111848"/>
+                </a:solidFill>
+                <a:latin typeface="Calibri" pitchFamily="34" charset="0"/>
+                <a:ea typeface="Calibri" pitchFamily="34" charset="-122"/>
+                <a:cs typeface="Calibri" pitchFamily="34" charset="-120"/>
+              </a:rPr>
+              <a:t> </a:t>
+            </a:r>
+            <a:r>
+              <a:rPr lang="en-US" altLang="ko-KR" sz="2100" dirty="0" err="1">
+                <a:solidFill>
+                  <a:srgbClr val="111848"/>
+                </a:solidFill>
+                <a:latin typeface="Calibri" pitchFamily="34" charset="0"/>
+                <a:ea typeface="Calibri" pitchFamily="34" charset="-122"/>
+                <a:cs typeface="Calibri" pitchFamily="34" charset="-120"/>
+              </a:rPr>
+              <a:t>오남용</a:t>
             </a:r>
             <a:endParaRPr lang="en-US" sz="2100" dirty="0"/>
           </a:p>
@@ -18972,7 +19065,7 @@
         </p:nvSpPr>
         <p:spPr>
           <a:xfrm>
-            <a:off x="6080760" y="4846320"/>
+            <a:off x="5945850" y="4846320"/>
             <a:ext cx="504395" cy="548640"/>
           </a:xfrm>
           <a:prstGeom prst="rect">
@@ -19011,7 +19104,7 @@
         </p:nvSpPr>
         <p:spPr>
           <a:xfrm>
-            <a:off x="12024360" y="4846320"/>
+            <a:off x="11889450" y="4846320"/>
             <a:ext cx="504395" cy="548640"/>
           </a:xfrm>
           <a:prstGeom prst="rect">
@@ -20530,49 +20623,6 @@
               </a:rPr>
               <a:t>이용자</a:t>
             </a:r>
-            <a:br>
-              <a:rPr lang="en-US" sz="1600" b="1" dirty="0">
-                <a:solidFill>
-                  <a:srgbClr val="FFFFFF"/>
-                </a:solidFill>
-                <a:latin typeface="Calibri" pitchFamily="34" charset="0"/>
-                <a:ea typeface="Calibri" pitchFamily="34" charset="-122"/>
-                <a:cs typeface="Calibri" pitchFamily="34" charset="-120"/>
-              </a:rPr>
-            </a:br>
-            <a:r>
-              <a:rPr lang="en-US" sz="1600" b="1" dirty="0">
-                <a:solidFill>
-                  <a:srgbClr val="FFFFFF"/>
-                </a:solidFill>
-                <a:latin typeface="Calibri" pitchFamily="34" charset="0"/>
-                <a:ea typeface="Calibri" pitchFamily="34" charset="-122"/>
-                <a:cs typeface="Calibri" pitchFamily="34" charset="-120"/>
-              </a:rPr>
-              <a:t>(</a:t>
-            </a:r>
-            <a:r>
-              <a:rPr lang="en-US" sz="1600" b="1" dirty="0" err="1">
-                <a:solidFill>
-                  <a:srgbClr val="FFFFFF"/>
-                </a:solidFill>
-                <a:latin typeface="Calibri" pitchFamily="34" charset="0"/>
-                <a:ea typeface="Calibri" pitchFamily="34" charset="-122"/>
-                <a:cs typeface="Calibri" pitchFamily="34" charset="-120"/>
-              </a:rPr>
-              <a:t>담당자</a:t>
-            </a:r>
-            <a:r>
-              <a:rPr lang="en-US" sz="1600" b="1" dirty="0">
-                <a:solidFill>
-                  <a:srgbClr val="FFFFFF"/>
-                </a:solidFill>
-                <a:latin typeface="Calibri" pitchFamily="34" charset="0"/>
-                <a:ea typeface="Calibri" pitchFamily="34" charset="-122"/>
-                <a:cs typeface="Calibri" pitchFamily="34" charset="-120"/>
-              </a:rPr>
-              <a:t>)</a:t>
-            </a:r>
             <a:endParaRPr lang="en-US" sz="1600" dirty="0"/>
           </a:p>
         </p:txBody>
@@ -21118,7 +21168,7 @@
         </p:nvSpPr>
         <p:spPr>
           <a:xfrm>
-            <a:off x="3255264" y="3757505"/>
+            <a:off x="3255264" y="3712535"/>
             <a:ext cx="164592" cy="457200"/>
           </a:xfrm>
           <a:prstGeom prst="rect">
@@ -21541,7 +21591,7 @@
         </p:nvSpPr>
         <p:spPr>
           <a:xfrm>
-            <a:off x="6199632" y="3757505"/>
+            <a:off x="6199632" y="3712535"/>
             <a:ext cx="164592" cy="457200"/>
           </a:xfrm>
           <a:prstGeom prst="rect">
@@ -21964,7 +22014,7 @@
         </p:nvSpPr>
         <p:spPr>
           <a:xfrm>
-            <a:off x="9144000" y="3757505"/>
+            <a:off x="9144000" y="3712535"/>
             <a:ext cx="164592" cy="457200"/>
           </a:xfrm>
           <a:prstGeom prst="rect">
@@ -22387,7 +22437,7 @@
         </p:nvSpPr>
         <p:spPr>
           <a:xfrm>
-            <a:off x="12088368" y="3757505"/>
+            <a:off x="12088368" y="3712535"/>
             <a:ext cx="164592" cy="457200"/>
           </a:xfrm>
           <a:prstGeom prst="rect">
@@ -22810,7 +22860,7 @@
         </p:nvSpPr>
         <p:spPr>
           <a:xfrm>
-            <a:off x="15032736" y="3757505"/>
+            <a:off x="15032736" y="3712535"/>
             <a:ext cx="164592" cy="457200"/>
           </a:xfrm>
           <a:prstGeom prst="rect">
@@ -31250,9 +31300,86 @@
                 <a:ea typeface="Calibri" pitchFamily="34" charset="-122"/>
                 <a:cs typeface="Calibri" pitchFamily="34" charset="-120"/>
               </a:rPr>
-              <a:t>특수문자 포함 비밀번호, 3개월 주기 변경</a:t>
-            </a:r>
-            <a:endParaRPr lang="en-US" sz="1700" dirty="0"/>
+              <a:t>특수문자 </a:t>
+            </a:r>
+            <a:r>
+              <a:rPr lang="en-US" sz="1700" dirty="0" err="1">
+                <a:solidFill>
+                  <a:srgbClr val="64748B"/>
+                </a:solidFill>
+                <a:latin typeface="Calibri" pitchFamily="34" charset="0"/>
+                <a:ea typeface="Calibri" pitchFamily="34" charset="-122"/>
+                <a:cs typeface="Calibri" pitchFamily="34" charset="-120"/>
+              </a:rPr>
+              <a:t>포함</a:t>
+            </a:r>
+            <a:r>
+              <a:rPr lang="en-US" sz="1700" dirty="0">
+                <a:solidFill>
+                  <a:srgbClr val="64748B"/>
+                </a:solidFill>
+                <a:latin typeface="Calibri" pitchFamily="34" charset="0"/>
+                <a:ea typeface="Calibri" pitchFamily="34" charset="-122"/>
+                <a:cs typeface="Calibri" pitchFamily="34" charset="-120"/>
+              </a:rPr>
+              <a:t> </a:t>
+            </a:r>
+            <a:r>
+              <a:rPr lang="en-US" sz="1700" dirty="0" err="1">
+                <a:solidFill>
+                  <a:srgbClr val="64748B"/>
+                </a:solidFill>
+                <a:latin typeface="Calibri" pitchFamily="34" charset="0"/>
+                <a:ea typeface="Calibri" pitchFamily="34" charset="-122"/>
+                <a:cs typeface="Calibri" pitchFamily="34" charset="-120"/>
+              </a:rPr>
+              <a:t>비밀번호</a:t>
+            </a:r>
+            <a:r>
+              <a:rPr lang="en-US" sz="1700" strike="sngStrike" dirty="0">
+                <a:solidFill>
+                  <a:srgbClr val="64748B"/>
+                </a:solidFill>
+                <a:latin typeface="Calibri" pitchFamily="34" charset="0"/>
+                <a:ea typeface="Calibri" pitchFamily="34" charset="-122"/>
+                <a:cs typeface="Calibri" pitchFamily="34" charset="-120"/>
+              </a:rPr>
+              <a:t>, 3개월 </a:t>
+            </a:r>
+            <a:r>
+              <a:rPr lang="en-US" sz="1700" strike="sngStrike" dirty="0" err="1">
+                <a:solidFill>
+                  <a:srgbClr val="64748B"/>
+                </a:solidFill>
+                <a:latin typeface="Calibri" pitchFamily="34" charset="0"/>
+                <a:ea typeface="Calibri" pitchFamily="34" charset="-122"/>
+                <a:cs typeface="Calibri" pitchFamily="34" charset="-120"/>
+              </a:rPr>
+              <a:t>주기</a:t>
+            </a:r>
+            <a:r>
+              <a:rPr lang="en-US" sz="1700" strike="sngStrike" dirty="0">
+                <a:solidFill>
+                  <a:srgbClr val="64748B"/>
+                </a:solidFill>
+                <a:latin typeface="Calibri" pitchFamily="34" charset="0"/>
+                <a:ea typeface="Calibri" pitchFamily="34" charset="-122"/>
+                <a:cs typeface="Calibri" pitchFamily="34" charset="-120"/>
+              </a:rPr>
+              <a:t> </a:t>
+            </a:r>
+            <a:r>
+              <a:rPr lang="en-US" sz="1700" strike="sngStrike" dirty="0" err="1">
+                <a:solidFill>
+                  <a:srgbClr val="64748B"/>
+                </a:solidFill>
+                <a:latin typeface="Calibri" pitchFamily="34" charset="0"/>
+                <a:ea typeface="Calibri" pitchFamily="34" charset="-122"/>
+                <a:cs typeface="Calibri" pitchFamily="34" charset="-120"/>
+              </a:rPr>
+              <a:t>변경</a:t>
+            </a:r>
+            <a:endParaRPr lang="en-US" sz="1700" strike="sngStrike" dirty="0"/>
           </a:p>
           <a:p>
             <a:pPr marL="0" indent="0">
@@ -37193,7 +37320,7 @@
                 <a:ea typeface="Calibri" pitchFamily="34" charset="-122"/>
                 <a:cs typeface="Calibri" pitchFamily="34" charset="-120"/>
               </a:rPr>
-              <a:t>무엇을 막을지 식별하고, KISA로 </a:t>
+              <a:t>무엇을 막을지 식별하고, </a:t>
             </a:r>
             <a:r>
               <a:rPr lang="en-US" sz="2000" b="1" dirty="0">
@@ -37204,7 +37331,7 @@
                 <a:ea typeface="Calibri" pitchFamily="34" charset="-122"/>
                 <a:cs typeface="Calibri" pitchFamily="34" charset="-120"/>
               </a:rPr>
-              <a:t>누가 언제 </a:t>
+              <a:t>KISA로 누가 언제 </a:t>
             </a:r>
             <a:r>
               <a:rPr lang="en-US" sz="2000" dirty="0">
@@ -38722,7 +38849,7 @@
         </p:nvSpPr>
         <p:spPr>
           <a:xfrm>
-            <a:off x="1828800" y="5394960"/>
+            <a:off x="1828800" y="5208697"/>
             <a:ext cx="6583680" cy="1371600"/>
           </a:xfrm>
           <a:prstGeom prst="rect">
@@ -38782,7 +38909,7 @@
         </p:nvSpPr>
         <p:spPr>
           <a:xfrm>
-            <a:off x="1828800" y="6949440"/>
+            <a:off x="1828800" y="6627713"/>
             <a:ext cx="6583680" cy="1371600"/>
           </a:xfrm>
           <a:prstGeom prst="rect">

--- a/ws01/class/3일차_1.pptx
+++ b/ws01/class/3일차_1.pptx
@@ -14321,7 +14321,7 @@
                 <a:ea typeface="Calibri" pitchFamily="34" charset="-122"/>
                 <a:cs typeface="Calibri" pitchFamily="34" charset="-120"/>
               </a:rPr>
-              <a:t>09:00-10:30</a:t>
+              <a:t>09:00-10:10</a:t>
             </a:r>
             <a:endParaRPr lang="en-US" sz="2000" dirty="0"/>
           </a:p>
@@ -14606,7 +14606,7 @@
                 <a:ea typeface="Calibri" pitchFamily="34" charset="-122"/>
                 <a:cs typeface="Calibri" pitchFamily="34" charset="-120"/>
               </a:rPr>
-              <a:t>10:45-12:00</a:t>
+              <a:t>10:20-11:20</a:t>
             </a:r>
             <a:endParaRPr lang="en-US" sz="2000" dirty="0"/>
           </a:p>
@@ -14891,7 +14891,7 @@
                 <a:ea typeface="Calibri" pitchFamily="34" charset="-122"/>
                 <a:cs typeface="Calibri" pitchFamily="34" charset="-120"/>
               </a:rPr>
-              <a:t>13:00-14:30</a:t>
+              <a:t>12:50-14:30</a:t>
             </a:r>
             <a:endParaRPr lang="en-US" sz="2000" dirty="0"/>
           </a:p>
@@ -15725,7 +15725,7 @@
                 <a:ea typeface="Calibri" pitchFamily="34" charset="-122"/>
                 <a:cs typeface="Calibri" pitchFamily="34" charset="-120"/>
               </a:rPr>
-              <a:t>12:00-13:00 점심</a:t>
+              <a:t>11:20-12:50 점심</a:t>
             </a:r>
             <a:endParaRPr lang="en-US" sz="1600" dirty="0"/>
           </a:p>
